--- a/docs/onboarding/pptx/05-comprador.pptx
+++ b/docs/onboarding/pptx/05-comprador.pptx
@@ -3615,7 +3615,7 @@
         <p:spPr>
           <a:xfrm>
             <a:off x="841248" y="1353312"/>
-            <a:ext cx="10509199" cy="868680"/>
+            <a:ext cx="5120640" cy="1280160"/>
           </a:xfrm>
           <a:prstGeom prst="rect">
             <a:avLst/>
@@ -3629,7 +3629,7 @@
           <a:lstStyle/>
           <a:p>
             <a:r>
-              <a:rPr sz="3000" b="1" spc="-40">
+              <a:rPr sz="2700" b="1" spc="-40">
                 <a:solidFill>
                   <a:srgbClr val="0A0A0A"/>
                 </a:solidFill>
@@ -3648,8 +3648,8 @@
         </p:nvSpPr>
         <p:spPr>
           <a:xfrm>
-            <a:off x="841248" y="2194560"/>
-            <a:ext cx="457200" cy="457200"/>
+            <a:off x="841248" y="1938528"/>
+            <a:ext cx="402336" cy="402336"/>
           </a:xfrm>
           <a:prstGeom prst="ellipse">
             <a:avLst/>
@@ -3682,7 +3682,7 @@
           <a:p>
             <a:pPr algn="ctr"/>
             <a:r>
-              <a:rPr sz="1500" b="1">
+              <a:rPr sz="1300" b="1">
                 <a:solidFill>
                   <a:srgbClr val="FFFFFF"/>
                 </a:solidFill>
@@ -3701,8 +3701,8 @@
         </p:nvSpPr>
         <p:spPr>
           <a:xfrm>
-            <a:off x="1554480" y="2176272"/>
-            <a:ext cx="9795967" cy="960120"/>
+            <a:off x="1463040" y="1920240"/>
+            <a:ext cx="4498848" cy="914400"/>
           </a:xfrm>
           <a:prstGeom prst="rect">
             <a:avLst/>
@@ -3716,7 +3716,7 @@
           <a:lstStyle/>
           <a:p>
             <a:r>
-              <a:rPr sz="1500" b="1">
+              <a:rPr sz="1350" b="1">
                 <a:solidFill>
                   <a:srgbClr val="0A0A0A"/>
                 </a:solidFill>
@@ -3728,11 +3728,11 @@
           <a:p>
             <a:pPr>
               <a:lnSpc>
-                <a:spcPct val="128000"/>
+                <a:spcPct val="125000"/>
               </a:lnSpc>
             </a:pPr>
             <a:r>
-              <a:rPr sz="1250" b="0">
+              <a:rPr sz="1100" b="0">
                 <a:solidFill>
                   <a:srgbClr val="52525B"/>
                 </a:solidFill>
@@ -3751,8 +3751,8 @@
         </p:nvSpPr>
         <p:spPr>
           <a:xfrm>
-            <a:off x="841248" y="3154680"/>
-            <a:ext cx="457200" cy="457200"/>
+            <a:off x="841248" y="2852928"/>
+            <a:ext cx="402336" cy="402336"/>
           </a:xfrm>
           <a:prstGeom prst="ellipse">
             <a:avLst/>
@@ -3785,7 +3785,7 @@
           <a:p>
             <a:pPr algn="ctr"/>
             <a:r>
-              <a:rPr sz="1500" b="1">
+              <a:rPr sz="1300" b="1">
                 <a:solidFill>
                   <a:srgbClr val="FFFFFF"/>
                 </a:solidFill>
@@ -3804,8 +3804,8 @@
         </p:nvSpPr>
         <p:spPr>
           <a:xfrm>
-            <a:off x="1554480" y="3136392"/>
-            <a:ext cx="9795967" cy="960120"/>
+            <a:off x="1463040" y="2834640"/>
+            <a:ext cx="4498848" cy="914400"/>
           </a:xfrm>
           <a:prstGeom prst="rect">
             <a:avLst/>
@@ -3819,7 +3819,7 @@
           <a:lstStyle/>
           <a:p>
             <a:r>
-              <a:rPr sz="1500" b="1">
+              <a:rPr sz="1350" b="1">
                 <a:solidFill>
                   <a:srgbClr val="0A0A0A"/>
                 </a:solidFill>
@@ -3831,11 +3831,11 @@
           <a:p>
             <a:pPr>
               <a:lnSpc>
-                <a:spcPct val="128000"/>
+                <a:spcPct val="125000"/>
               </a:lnSpc>
             </a:pPr>
             <a:r>
-              <a:rPr sz="1250" b="0">
+              <a:rPr sz="1100" b="0">
                 <a:solidFill>
                   <a:srgbClr val="52525B"/>
                 </a:solidFill>
@@ -3854,8 +3854,8 @@
         </p:nvSpPr>
         <p:spPr>
           <a:xfrm>
-            <a:off x="841248" y="4114800"/>
-            <a:ext cx="457200" cy="457200"/>
+            <a:off x="841248" y="3767328"/>
+            <a:ext cx="402336" cy="402336"/>
           </a:xfrm>
           <a:prstGeom prst="ellipse">
             <a:avLst/>
@@ -3888,7 +3888,7 @@
           <a:p>
             <a:pPr algn="ctr"/>
             <a:r>
-              <a:rPr sz="1500" b="1">
+              <a:rPr sz="1300" b="1">
                 <a:solidFill>
                   <a:srgbClr val="FFFFFF"/>
                 </a:solidFill>
@@ -3907,8 +3907,8 @@
         </p:nvSpPr>
         <p:spPr>
           <a:xfrm>
-            <a:off x="1554480" y="4096512"/>
-            <a:ext cx="9795967" cy="960120"/>
+            <a:off x="1463040" y="3749040"/>
+            <a:ext cx="4498848" cy="914400"/>
           </a:xfrm>
           <a:prstGeom prst="rect">
             <a:avLst/>
@@ -3922,7 +3922,7 @@
           <a:lstStyle/>
           <a:p>
             <a:r>
-              <a:rPr sz="1500" b="1">
+              <a:rPr sz="1350" b="1">
                 <a:solidFill>
                   <a:srgbClr val="0A0A0A"/>
                 </a:solidFill>
@@ -3934,11 +3934,11 @@
           <a:p>
             <a:pPr>
               <a:lnSpc>
-                <a:spcPct val="128000"/>
+                <a:spcPct val="125000"/>
               </a:lnSpc>
             </a:pPr>
             <a:r>
-              <a:rPr sz="1250" b="0">
+              <a:rPr sz="1100" b="0">
                 <a:solidFill>
                   <a:srgbClr val="52525B"/>
                 </a:solidFill>
@@ -3957,8 +3957,8 @@
         </p:nvSpPr>
         <p:spPr>
           <a:xfrm>
-            <a:off x="841248" y="5074920"/>
-            <a:ext cx="457200" cy="457200"/>
+            <a:off x="841248" y="4681728"/>
+            <a:ext cx="402336" cy="402336"/>
           </a:xfrm>
           <a:prstGeom prst="ellipse">
             <a:avLst/>
@@ -3991,7 +3991,7 @@
           <a:p>
             <a:pPr algn="ctr"/>
             <a:r>
-              <a:rPr sz="1500" b="1">
+              <a:rPr sz="1300" b="1">
                 <a:solidFill>
                   <a:srgbClr val="FFFFFF"/>
                 </a:solidFill>
@@ -4010,8 +4010,8 @@
         </p:nvSpPr>
         <p:spPr>
           <a:xfrm>
-            <a:off x="1554480" y="5056632"/>
-            <a:ext cx="9795967" cy="960120"/>
+            <a:off x="1463040" y="4663440"/>
+            <a:ext cx="4498848" cy="914400"/>
           </a:xfrm>
           <a:prstGeom prst="rect">
             <a:avLst/>
@@ -4025,7 +4025,7 @@
           <a:lstStyle/>
           <a:p>
             <a:r>
-              <a:rPr sz="1500" b="1">
+              <a:rPr sz="1350" b="1">
                 <a:solidFill>
                   <a:srgbClr val="0A0A0A"/>
                 </a:solidFill>
@@ -4037,24 +4037,93 @@
           <a:p>
             <a:pPr>
               <a:lnSpc>
-                <a:spcPct val="128000"/>
+                <a:spcPct val="125000"/>
               </a:lnSpc>
             </a:pPr>
             <a:r>
-              <a:rPr sz="1250" b="0">
+              <a:rPr sz="1100" b="0">
                 <a:solidFill>
                   <a:srgbClr val="52525B"/>
                 </a:solidFill>
                 <a:latin typeface="Calibri"/>
               </a:rPr>
               <a:t>Adjuntás el recibo desde la misma página. Listo: el equipo lo verifica.</a:t>
+            </a:r>
+          </a:p>
+        </p:txBody>
+      </p:sp>
+      <p:sp>
+        <p:nvSpPr>
+          <p:cNvPr id="13" name="Rounded Rectangle 12"/>
+          <p:cNvSpPr/>
+          <p:nvPr/>
+        </p:nvSpPr>
+        <p:spPr>
+          <a:xfrm>
+            <a:off x="6419088" y="932688"/>
+            <a:ext cx="4931359" cy="5010912"/>
+          </a:xfrm>
+          <a:prstGeom prst="roundRect">
+            <a:avLst>
+              <a:gd name="adj" fmla="val 4000"/>
+            </a:avLst>
+          </a:prstGeom>
+          <a:solidFill>
+            <a:srgbClr val="F1F1F3"/>
+          </a:solidFill>
+          <a:ln w="12700">
+            <a:solidFill>
+              <a:srgbClr val="A1A1AA"/>
+            </a:solidFill>
+          </a:ln>
+          <a:effectLst/>
+        </p:spPr>
+        <p:style>
+          <a:lnRef idx="1">
+            <a:schemeClr val="accent1"/>
+          </a:lnRef>
+          <a:fillRef idx="3">
+            <a:schemeClr val="accent1"/>
+          </a:fillRef>
+          <a:effectRef idx="2">
+            <a:schemeClr val="accent1"/>
+          </a:effectRef>
+          <a:fontRef idx="minor">
+            <a:schemeClr val="lt1"/>
+          </a:fontRef>
+        </p:style>
+        <p:txBody>
+          <a:bodyPr rtlCol="0" anchor="ctr" wrap="square"/>
+          <a:lstStyle/>
+          <a:p>
+            <a:pPr algn="ctr"/>
+            <a:r>
+              <a:rPr sz="1200" b="1" spc="120">
+                <a:solidFill>
+                  <a:srgbClr val="71717A"/>
+                </a:solidFill>
+                <a:latin typeface="Calibri"/>
+              </a:rPr>
+              <a:t>CAPTURA PENDIENTE</a:t>
+            </a:r>
+          </a:p>
+          <a:p>
+            <a:pPr algn="ctr"/>
+            <a:r>
+              <a:rPr sz="1050" b="0">
+                <a:solidFill>
+                  <a:srgbClr val="A1A1AA"/>
+                </a:solidFill>
+                <a:latin typeface="Calibri"/>
+              </a:rPr>
+              <a:t>Página de ganador</a:t>
             </a:r>
           </a:p>
         </p:txBody>
       </p:sp>
       <p:pic>
         <p:nvPicPr>
-          <p:cNvPr id="13" name="Picture 12" descr="renew-wordmark-black.png"/>
+          <p:cNvPr id="14" name="Picture 13" descr="renew-wordmark-black.png"/>
           <p:cNvPicPr>
             <a:picLocks noChangeAspect="1"/>
           </p:cNvPicPr>
@@ -4078,7 +4147,7 @@
       </p:pic>
       <p:sp>
         <p:nvSpPr>
-          <p:cNvPr id="14" name="TextBox 13"/>
+          <p:cNvPr id="15" name="TextBox 14"/>
           <p:cNvSpPr txBox="1"/>
           <p:nvPr/>
         </p:nvSpPr>
@@ -7758,7 +7827,7 @@
         <p:spPr>
           <a:xfrm>
             <a:off x="841248" y="1353312"/>
-            <a:ext cx="10509199" cy="868680"/>
+            <a:ext cx="5120640" cy="1280160"/>
           </a:xfrm>
           <a:prstGeom prst="rect">
             <a:avLst/>
@@ -7772,7 +7841,7 @@
           <a:lstStyle/>
           <a:p>
             <a:r>
-              <a:rPr sz="3000" b="1" spc="-40">
+              <a:rPr sz="2700" b="1" spc="-40">
                 <a:solidFill>
                   <a:srgbClr val="0A0A0A"/>
                 </a:solidFill>
@@ -7791,8 +7860,8 @@
         </p:nvSpPr>
         <p:spPr>
           <a:xfrm>
-            <a:off x="841248" y="2194560"/>
-            <a:ext cx="457200" cy="457200"/>
+            <a:off x="841248" y="2414016"/>
+            <a:ext cx="402336" cy="402336"/>
           </a:xfrm>
           <a:prstGeom prst="ellipse">
             <a:avLst/>
@@ -7825,7 +7894,7 @@
           <a:p>
             <a:pPr algn="ctr"/>
             <a:r>
-              <a:rPr sz="1500" b="1">
+              <a:rPr sz="1300" b="1">
                 <a:solidFill>
                   <a:srgbClr val="FFFFFF"/>
                 </a:solidFill>
@@ -7844,8 +7913,8 @@
         </p:nvSpPr>
         <p:spPr>
           <a:xfrm>
-            <a:off x="1554480" y="2176272"/>
-            <a:ext cx="9795967" cy="960120"/>
+            <a:off x="1463040" y="2395728"/>
+            <a:ext cx="4498848" cy="914400"/>
           </a:xfrm>
           <a:prstGeom prst="rect">
             <a:avLst/>
@@ -7859,7 +7928,7 @@
           <a:lstStyle/>
           <a:p>
             <a:r>
-              <a:rPr sz="1500" b="1">
+              <a:rPr sz="1350" b="1">
                 <a:solidFill>
                   <a:srgbClr val="0A0A0A"/>
                 </a:solidFill>
@@ -7871,11 +7940,11 @@
           <a:p>
             <a:pPr>
               <a:lnSpc>
-                <a:spcPct val="128000"/>
+                <a:spcPct val="125000"/>
               </a:lnSpc>
             </a:pPr>
             <a:r>
-              <a:rPr sz="1250" b="0">
+              <a:rPr sz="1100" b="0">
                 <a:solidFill>
                   <a:srgbClr val="52525B"/>
                 </a:solidFill>
@@ -7894,8 +7963,8 @@
         </p:nvSpPr>
         <p:spPr>
           <a:xfrm>
-            <a:off x="841248" y="3154680"/>
-            <a:ext cx="457200" cy="457200"/>
+            <a:off x="841248" y="3328416"/>
+            <a:ext cx="402336" cy="402336"/>
           </a:xfrm>
           <a:prstGeom prst="ellipse">
             <a:avLst/>
@@ -7928,7 +7997,7 @@
           <a:p>
             <a:pPr algn="ctr"/>
             <a:r>
-              <a:rPr sz="1500" b="1">
+              <a:rPr sz="1300" b="1">
                 <a:solidFill>
                   <a:srgbClr val="FFFFFF"/>
                 </a:solidFill>
@@ -7947,8 +8016,8 @@
         </p:nvSpPr>
         <p:spPr>
           <a:xfrm>
-            <a:off x="1554480" y="3136392"/>
-            <a:ext cx="9795967" cy="960120"/>
+            <a:off x="1463040" y="3310128"/>
+            <a:ext cx="4498848" cy="914400"/>
           </a:xfrm>
           <a:prstGeom prst="rect">
             <a:avLst/>
@@ -7962,7 +8031,7 @@
           <a:lstStyle/>
           <a:p>
             <a:r>
-              <a:rPr sz="1500" b="1">
+              <a:rPr sz="1350" b="1">
                 <a:solidFill>
                   <a:srgbClr val="0A0A0A"/>
                 </a:solidFill>
@@ -7974,11 +8043,11 @@
           <a:p>
             <a:pPr>
               <a:lnSpc>
-                <a:spcPct val="128000"/>
+                <a:spcPct val="125000"/>
               </a:lnSpc>
             </a:pPr>
             <a:r>
-              <a:rPr sz="1250" b="0">
+              <a:rPr sz="1100" b="0">
                 <a:solidFill>
                   <a:srgbClr val="52525B"/>
                 </a:solidFill>
@@ -7997,8 +8066,8 @@
         </p:nvSpPr>
         <p:spPr>
           <a:xfrm>
-            <a:off x="841248" y="4114800"/>
-            <a:ext cx="457200" cy="457200"/>
+            <a:off x="841248" y="4242816"/>
+            <a:ext cx="402336" cy="402336"/>
           </a:xfrm>
           <a:prstGeom prst="ellipse">
             <a:avLst/>
@@ -8031,7 +8100,7 @@
           <a:p>
             <a:pPr algn="ctr"/>
             <a:r>
-              <a:rPr sz="1500" b="1">
+              <a:rPr sz="1300" b="1">
                 <a:solidFill>
                   <a:srgbClr val="FFFFFF"/>
                 </a:solidFill>
@@ -8050,8 +8119,8 @@
         </p:nvSpPr>
         <p:spPr>
           <a:xfrm>
-            <a:off x="1554480" y="4096512"/>
-            <a:ext cx="9795967" cy="960120"/>
+            <a:off x="1463040" y="4224528"/>
+            <a:ext cx="4498848" cy="914400"/>
           </a:xfrm>
           <a:prstGeom prst="rect">
             <a:avLst/>
@@ -8065,7 +8134,7 @@
           <a:lstStyle/>
           <a:p>
             <a:r>
-              <a:rPr sz="1500" b="1">
+              <a:rPr sz="1350" b="1">
                 <a:solidFill>
                   <a:srgbClr val="0A0A0A"/>
                 </a:solidFill>
@@ -8077,24 +8146,93 @@
           <a:p>
             <a:pPr>
               <a:lnSpc>
-                <a:spcPct val="128000"/>
+                <a:spcPct val="125000"/>
               </a:lnSpc>
             </a:pPr>
             <a:r>
-              <a:rPr sz="1250" b="0">
+              <a:rPr sz="1100" b="0">
                 <a:solidFill>
                   <a:srgbClr val="52525B"/>
                 </a:solidFill>
                 <a:latin typeface="Calibri"/>
               </a:rPr>
               <a:t>Precio actual, oferta mínima, incremento y cuánto tiempo queda.</a:t>
+            </a:r>
+          </a:p>
+        </p:txBody>
+      </p:sp>
+      <p:sp>
+        <p:nvSpPr>
+          <p:cNvPr id="11" name="Rounded Rectangle 10"/>
+          <p:cNvSpPr/>
+          <p:nvPr/>
+        </p:nvSpPr>
+        <p:spPr>
+          <a:xfrm>
+            <a:off x="6419088" y="932688"/>
+            <a:ext cx="4931359" cy="5010912"/>
+          </a:xfrm>
+          <a:prstGeom prst="roundRect">
+            <a:avLst>
+              <a:gd name="adj" fmla="val 4000"/>
+            </a:avLst>
+          </a:prstGeom>
+          <a:solidFill>
+            <a:srgbClr val="F1F1F3"/>
+          </a:solidFill>
+          <a:ln w="12700">
+            <a:solidFill>
+              <a:srgbClr val="A1A1AA"/>
+            </a:solidFill>
+          </a:ln>
+          <a:effectLst/>
+        </p:spPr>
+        <p:style>
+          <a:lnRef idx="1">
+            <a:schemeClr val="accent1"/>
+          </a:lnRef>
+          <a:fillRef idx="3">
+            <a:schemeClr val="accent1"/>
+          </a:fillRef>
+          <a:effectRef idx="2">
+            <a:schemeClr val="accent1"/>
+          </a:effectRef>
+          <a:fontRef idx="minor">
+            <a:schemeClr val="lt1"/>
+          </a:fontRef>
+        </p:style>
+        <p:txBody>
+          <a:bodyPr rtlCol="0" anchor="ctr" wrap="square"/>
+          <a:lstStyle/>
+          <a:p>
+            <a:pPr algn="ctr"/>
+            <a:r>
+              <a:rPr sz="1200" b="1" spc="120">
+                <a:solidFill>
+                  <a:srgbClr val="71717A"/>
+                </a:solidFill>
+                <a:latin typeface="Calibri"/>
+              </a:rPr>
+              <a:t>CAPTURA PENDIENTE</a:t>
+            </a:r>
+          </a:p>
+          <a:p>
+            <a:pPr algn="ctr"/>
+            <a:r>
+              <a:rPr sz="1050" b="0">
+                <a:solidFill>
+                  <a:srgbClr val="A1A1AA"/>
+                </a:solidFill>
+                <a:latin typeface="Calibri"/>
+              </a:rPr>
+              <a:t>Catálogo y detalle de vehículo</a:t>
             </a:r>
           </a:p>
         </p:txBody>
       </p:sp>
       <p:pic>
         <p:nvPicPr>
-          <p:cNvPr id="11" name="Picture 10" descr="renew-wordmark-black.png"/>
+          <p:cNvPr id="12" name="Picture 11" descr="renew-wordmark-black.png"/>
           <p:cNvPicPr>
             <a:picLocks noChangeAspect="1"/>
           </p:cNvPicPr>
@@ -8118,7 +8256,7 @@
       </p:pic>
       <p:sp>
         <p:nvSpPr>
-          <p:cNvPr id="12" name="TextBox 11"/>
+          <p:cNvPr id="13" name="TextBox 12"/>
           <p:cNvSpPr txBox="1"/>
           <p:nvPr/>
         </p:nvSpPr>
@@ -8277,7 +8415,7 @@
         <p:spPr>
           <a:xfrm>
             <a:off x="841248" y="1353312"/>
-            <a:ext cx="10509199" cy="868680"/>
+            <a:ext cx="5120640" cy="1280160"/>
           </a:xfrm>
           <a:prstGeom prst="rect">
             <a:avLst/>
@@ -8291,7 +8429,7 @@
           <a:lstStyle/>
           <a:p>
             <a:r>
-              <a:rPr sz="3000" b="1" spc="-40">
+              <a:rPr sz="2700" b="1" spc="-40">
                 <a:solidFill>
                   <a:srgbClr val="0A0A0A"/>
                 </a:solidFill>
@@ -8310,8 +8448,8 @@
         </p:nvSpPr>
         <p:spPr>
           <a:xfrm>
-            <a:off x="841248" y="2194560"/>
-            <a:ext cx="9601200" cy="822960"/>
+            <a:off x="841248" y="1938528"/>
+            <a:ext cx="5120640" cy="1097280"/>
           </a:xfrm>
           <a:prstGeom prst="rect">
             <a:avLst/>
@@ -8326,11 +8464,11 @@
           <a:p>
             <a:pPr>
               <a:lnSpc>
-                <a:spcPct val="135000"/>
+                <a:spcPct val="130000"/>
               </a:lnSpc>
             </a:pPr>
             <a:r>
-              <a:rPr sz="1400" b="0">
+              <a:rPr sz="1300" b="0">
                 <a:solidFill>
                   <a:srgbClr val="52525B"/>
                 </a:solidFill>
@@ -8349,8 +8487,8 @@
         </p:nvSpPr>
         <p:spPr>
           <a:xfrm>
-            <a:off x="841248" y="2651760"/>
-            <a:ext cx="457200" cy="457200"/>
+            <a:off x="841248" y="2633472"/>
+            <a:ext cx="402336" cy="402336"/>
           </a:xfrm>
           <a:prstGeom prst="ellipse">
             <a:avLst/>
@@ -8383,7 +8521,7 @@
           <a:p>
             <a:pPr algn="ctr"/>
             <a:r>
-              <a:rPr sz="1500" b="1">
+              <a:rPr sz="1300" b="1">
                 <a:solidFill>
                   <a:srgbClr val="FFFFFF"/>
                 </a:solidFill>
@@ -8402,8 +8540,8 @@
         </p:nvSpPr>
         <p:spPr>
           <a:xfrm>
-            <a:off x="1554480" y="2633472"/>
-            <a:ext cx="9795967" cy="845820"/>
+            <a:off x="1463040" y="2615184"/>
+            <a:ext cx="4498848" cy="850392"/>
           </a:xfrm>
           <a:prstGeom prst="rect">
             <a:avLst/>
@@ -8417,7 +8555,7 @@
           <a:lstStyle/>
           <a:p>
             <a:r>
-              <a:rPr sz="1500" b="1">
+              <a:rPr sz="1350" b="1">
                 <a:solidFill>
                   <a:srgbClr val="0A0A0A"/>
                 </a:solidFill>
@@ -8429,11 +8567,11 @@
           <a:p>
             <a:pPr>
               <a:lnSpc>
-                <a:spcPct val="128000"/>
+                <a:spcPct val="125000"/>
               </a:lnSpc>
             </a:pPr>
             <a:r>
-              <a:rPr sz="1250" b="0">
+              <a:rPr sz="1100" b="0">
                 <a:solidFill>
                   <a:srgbClr val="52525B"/>
                 </a:solidFill>
@@ -8452,8 +8590,8 @@
         </p:nvSpPr>
         <p:spPr>
           <a:xfrm>
-            <a:off x="841248" y="3497580"/>
-            <a:ext cx="457200" cy="457200"/>
+            <a:off x="841248" y="3483864"/>
+            <a:ext cx="402336" cy="402336"/>
           </a:xfrm>
           <a:prstGeom prst="ellipse">
             <a:avLst/>
@@ -8486,7 +8624,7 @@
           <a:p>
             <a:pPr algn="ctr"/>
             <a:r>
-              <a:rPr sz="1500" b="1">
+              <a:rPr sz="1300" b="1">
                 <a:solidFill>
                   <a:srgbClr val="FFFFFF"/>
                 </a:solidFill>
@@ -8505,8 +8643,8 @@
         </p:nvSpPr>
         <p:spPr>
           <a:xfrm>
-            <a:off x="1554480" y="3479292"/>
-            <a:ext cx="9795967" cy="845820"/>
+            <a:off x="1463040" y="3465576"/>
+            <a:ext cx="4498848" cy="850392"/>
           </a:xfrm>
           <a:prstGeom prst="rect">
             <a:avLst/>
@@ -8520,7 +8658,7 @@
           <a:lstStyle/>
           <a:p>
             <a:r>
-              <a:rPr sz="1500" b="1">
+              <a:rPr sz="1350" b="1">
                 <a:solidFill>
                   <a:srgbClr val="0A0A0A"/>
                 </a:solidFill>
@@ -8532,11 +8670,11 @@
           <a:p>
             <a:pPr>
               <a:lnSpc>
-                <a:spcPct val="128000"/>
+                <a:spcPct val="125000"/>
               </a:lnSpc>
             </a:pPr>
             <a:r>
-              <a:rPr sz="1250" b="0">
+              <a:rPr sz="1100" b="0">
                 <a:solidFill>
                   <a:srgbClr val="52525B"/>
                 </a:solidFill>
@@ -8555,8 +8693,8 @@
         </p:nvSpPr>
         <p:spPr>
           <a:xfrm>
-            <a:off x="841248" y="4343400"/>
-            <a:ext cx="457200" cy="457200"/>
+            <a:off x="841248" y="4334256"/>
+            <a:ext cx="402336" cy="402336"/>
           </a:xfrm>
           <a:prstGeom prst="ellipse">
             <a:avLst/>
@@ -8589,7 +8727,7 @@
           <a:p>
             <a:pPr algn="ctr"/>
             <a:r>
-              <a:rPr sz="1500" b="1">
+              <a:rPr sz="1300" b="1">
                 <a:solidFill>
                   <a:srgbClr val="FFFFFF"/>
                 </a:solidFill>
@@ -8608,8 +8746,8 @@
         </p:nvSpPr>
         <p:spPr>
           <a:xfrm>
-            <a:off x="1554480" y="4325112"/>
-            <a:ext cx="9795967" cy="845820"/>
+            <a:off x="1463040" y="4315968"/>
+            <a:ext cx="4498848" cy="850392"/>
           </a:xfrm>
           <a:prstGeom prst="rect">
             <a:avLst/>
@@ -8623,7 +8761,7 @@
           <a:lstStyle/>
           <a:p>
             <a:r>
-              <a:rPr sz="1500" b="1">
+              <a:rPr sz="1350" b="1">
                 <a:solidFill>
                   <a:srgbClr val="0A0A0A"/>
                 </a:solidFill>
@@ -8635,11 +8773,11 @@
           <a:p>
             <a:pPr>
               <a:lnSpc>
-                <a:spcPct val="128000"/>
+                <a:spcPct val="125000"/>
               </a:lnSpc>
             </a:pPr>
             <a:r>
-              <a:rPr sz="1250" b="0">
+              <a:rPr sz="1100" b="0">
                 <a:solidFill>
                   <a:srgbClr val="52525B"/>
                 </a:solidFill>
@@ -8658,8 +8796,8 @@
         </p:nvSpPr>
         <p:spPr>
           <a:xfrm>
-            <a:off x="841248" y="5189220"/>
-            <a:ext cx="457200" cy="457200"/>
+            <a:off x="841248" y="5184648"/>
+            <a:ext cx="402336" cy="402336"/>
           </a:xfrm>
           <a:prstGeom prst="ellipse">
             <a:avLst/>
@@ -8692,7 +8830,7 @@
           <a:p>
             <a:pPr algn="ctr"/>
             <a:r>
-              <a:rPr sz="1500" b="1">
+              <a:rPr sz="1300" b="1">
                 <a:solidFill>
                   <a:srgbClr val="FFFFFF"/>
                 </a:solidFill>
@@ -8711,8 +8849,8 @@
         </p:nvSpPr>
         <p:spPr>
           <a:xfrm>
-            <a:off x="1554480" y="5170932"/>
-            <a:ext cx="9795967" cy="845820"/>
+            <a:off x="1463040" y="5166360"/>
+            <a:ext cx="4498848" cy="850392"/>
           </a:xfrm>
           <a:prstGeom prst="rect">
             <a:avLst/>
@@ -8726,7 +8864,7 @@
           <a:lstStyle/>
           <a:p>
             <a:r>
-              <a:rPr sz="1500" b="1">
+              <a:rPr sz="1350" b="1">
                 <a:solidFill>
                   <a:srgbClr val="0A0A0A"/>
                 </a:solidFill>
@@ -8738,24 +8876,93 @@
           <a:p>
             <a:pPr>
               <a:lnSpc>
-                <a:spcPct val="128000"/>
+                <a:spcPct val="125000"/>
               </a:lnSpc>
             </a:pPr>
             <a:r>
-              <a:rPr sz="1250" b="0">
+              <a:rPr sz="1100" b="0">
                 <a:solidFill>
                   <a:srgbClr val="52525B"/>
                 </a:solidFill>
                 <a:latin typeface="Calibri"/>
               </a:rPr>
               <a:t>Si sos el mejor postor, ves «Sos el mejor postor por ahora».</a:t>
+            </a:r>
+          </a:p>
+        </p:txBody>
+      </p:sp>
+      <p:sp>
+        <p:nvSpPr>
+          <p:cNvPr id="14" name="Rounded Rectangle 13"/>
+          <p:cNvSpPr/>
+          <p:nvPr/>
+        </p:nvSpPr>
+        <p:spPr>
+          <a:xfrm>
+            <a:off x="6419088" y="932688"/>
+            <a:ext cx="4931359" cy="5010912"/>
+          </a:xfrm>
+          <a:prstGeom prst="roundRect">
+            <a:avLst>
+              <a:gd name="adj" fmla="val 4000"/>
+            </a:avLst>
+          </a:prstGeom>
+          <a:solidFill>
+            <a:srgbClr val="F1F1F3"/>
+          </a:solidFill>
+          <a:ln w="12700">
+            <a:solidFill>
+              <a:srgbClr val="A1A1AA"/>
+            </a:solidFill>
+          </a:ln>
+          <a:effectLst/>
+        </p:spPr>
+        <p:style>
+          <a:lnRef idx="1">
+            <a:schemeClr val="accent1"/>
+          </a:lnRef>
+          <a:fillRef idx="3">
+            <a:schemeClr val="accent1"/>
+          </a:fillRef>
+          <a:effectRef idx="2">
+            <a:schemeClr val="accent1"/>
+          </a:effectRef>
+          <a:fontRef idx="minor">
+            <a:schemeClr val="lt1"/>
+          </a:fontRef>
+        </p:style>
+        <p:txBody>
+          <a:bodyPr rtlCol="0" anchor="ctr" wrap="square"/>
+          <a:lstStyle/>
+          <a:p>
+            <a:pPr algn="ctr"/>
+            <a:r>
+              <a:rPr sz="1200" b="1" spc="120">
+                <a:solidFill>
+                  <a:srgbClr val="71717A"/>
+                </a:solidFill>
+                <a:latin typeface="Calibri"/>
+              </a:rPr>
+              <a:t>CAPTURA PENDIENTE</a:t>
+            </a:r>
+          </a:p>
+          <a:p>
+            <a:pPr algn="ctr"/>
+            <a:r>
+              <a:rPr sz="1050" b="0">
+                <a:solidFill>
+                  <a:srgbClr val="A1A1AA"/>
+                </a:solidFill>
+                <a:latin typeface="Calibri"/>
+              </a:rPr>
+              <a:t>Panel de pujas</a:t>
             </a:r>
           </a:p>
         </p:txBody>
       </p:sp>
       <p:pic>
         <p:nvPicPr>
-          <p:cNvPr id="14" name="Picture 13" descr="renew-wordmark-black.png"/>
+          <p:cNvPr id="15" name="Picture 14" descr="renew-wordmark-black.png"/>
           <p:cNvPicPr>
             <a:picLocks noChangeAspect="1"/>
           </p:cNvPicPr>
@@ -8779,7 +8986,7 @@
       </p:pic>
       <p:sp>
         <p:nvSpPr>
-          <p:cNvPr id="15" name="TextBox 14"/>
+          <p:cNvPr id="16" name="TextBox 15"/>
           <p:cNvSpPr txBox="1"/>
           <p:nvPr/>
         </p:nvSpPr>

--- a/docs/onboarding/pptx/05-comprador.pptx
+++ b/docs/onboarding/pptx/05-comprador.pptx
@@ -3315,7 +3315,7 @@
                 </a:solidFill>
                 <a:latin typeface="Calibri"/>
               </a:rPr>
-              <a:t>    Santa Rosa Automotores · Paraguay</a:t>
+              <a:t>    Santa Rosa Paraguay SA · Paraguay</a:t>
             </a:r>
           </a:p>
         </p:txBody>
@@ -5841,7 +5841,7 @@
                 </a:solidFill>
                 <a:latin typeface="Calibri"/>
               </a:rPr>
-              <a:t>Renew Subastas · Santa Rosa Automotores</a:t>
+              <a:t>Renew Subastas · Santa Rosa Paraguay SA</a:t>
             </a:r>
           </a:p>
         </p:txBody>
